--- a/slides/00_course_intro.pptx
+++ b/slides/00_course_intro.pptx
@@ -1247,13 +1247,13 @@
       <dgm:prSet presAssocID="{85556EB6-77CF-499D-BB6E-2C5024EC1F11}" presName="iconRect" presStyleLbl="node1" presStyleIdx="0" presStyleCnt="3"/>
       <dgm:spPr>
         <a:blipFill>
-          <a:blip xmlns:r="http://schemas.openxmlformats.org/officeDocument/2006/relationships" r:embed="rId1">
+          <a:blip xmlns:r="http://schemas.openxmlformats.org/officeDocument/2006/relationships">
             <a:extLst>
               <a:ext uri="{28A0092B-C50C-407E-A947-70E740481C1C}">
                 <a14:useLocalDpi xmlns:a14="http://schemas.microsoft.com/office/drawing/2010/main" val="0"/>
               </a:ext>
               <a:ext uri="{96DAC541-7B7A-43D3-8B79-37D633B846F1}">
-                <asvg:svgBlip xmlns:asvg="http://schemas.microsoft.com/office/drawing/2016/SVG/main" r:embed="rId2"/>
+                <asvg:svgBlip xmlns:asvg="http://schemas.microsoft.com/office/drawing/2016/SVG/main" r:embed="rId1"/>
               </a:ext>
             </a:extLst>
           </a:blip>
@@ -1300,13 +1300,13 @@
       <dgm:prSet presAssocID="{FD37932E-AB41-4F9E-B178-8A6DF0D730CD}" presName="iconRect" presStyleLbl="node1" presStyleIdx="1" presStyleCnt="3"/>
       <dgm:spPr>
         <a:blipFill>
-          <a:blip xmlns:r="http://schemas.openxmlformats.org/officeDocument/2006/relationships" r:embed="rId3">
+          <a:blip xmlns:r="http://schemas.openxmlformats.org/officeDocument/2006/relationships">
             <a:extLst>
               <a:ext uri="{28A0092B-C50C-407E-A947-70E740481C1C}">
                 <a14:useLocalDpi xmlns:a14="http://schemas.microsoft.com/office/drawing/2010/main" val="0"/>
               </a:ext>
               <a:ext uri="{96DAC541-7B7A-43D3-8B79-37D633B846F1}">
-                <asvg:svgBlip xmlns:asvg="http://schemas.microsoft.com/office/drawing/2016/SVG/main" r:embed="rId4"/>
+                <asvg:svgBlip xmlns:asvg="http://schemas.microsoft.com/office/drawing/2016/SVG/main" r:embed="rId2"/>
               </a:ext>
             </a:extLst>
           </a:blip>
@@ -1353,10 +1353,10 @@
       <dgm:prSet presAssocID="{343D494A-2D2E-4876-BC06-03FE2CAE800A}" presName="iconRect" presStyleLbl="node1" presStyleIdx="2" presStyleCnt="3"/>
       <dgm:spPr>
         <a:blipFill>
-          <a:blip xmlns:r="http://schemas.openxmlformats.org/officeDocument/2006/relationships" r:embed="rId5">
+          <a:blip xmlns:r="http://schemas.openxmlformats.org/officeDocument/2006/relationships">
             <a:extLst>
               <a:ext uri="{96DAC541-7B7A-43D3-8B79-37D633B846F1}">
-                <asvg:svgBlip xmlns:asvg="http://schemas.microsoft.com/office/drawing/2016/SVG/main" r:embed="rId6"/>
+                <asvg:svgBlip xmlns:asvg="http://schemas.microsoft.com/office/drawing/2016/SVG/main" r:embed="rId3"/>
               </a:ext>
             </a:extLst>
           </a:blip>
@@ -1483,13 +1483,13 @@
           <a:avLst/>
         </a:prstGeom>
         <a:blipFill>
-          <a:blip xmlns:r="http://schemas.openxmlformats.org/officeDocument/2006/relationships" r:embed="rId1">
+          <a:blip xmlns:r="http://schemas.openxmlformats.org/officeDocument/2006/relationships">
             <a:extLst>
               <a:ext uri="{28A0092B-C50C-407E-A947-70E740481C1C}">
                 <a14:useLocalDpi xmlns:a14="http://schemas.microsoft.com/office/drawing/2010/main" val="0"/>
               </a:ext>
               <a:ext uri="{96DAC541-7B7A-43D3-8B79-37D633B846F1}">
-                <asvg:svgBlip xmlns:asvg="http://schemas.microsoft.com/office/drawing/2016/SVG/main" r:embed="rId2"/>
+                <asvg:svgBlip xmlns:asvg="http://schemas.microsoft.com/office/drawing/2016/SVG/main" r:embed="rId1"/>
               </a:ext>
             </a:extLst>
           </a:blip>
@@ -1637,13 +1637,13 @@
           <a:avLst/>
         </a:prstGeom>
         <a:blipFill>
-          <a:blip xmlns:r="http://schemas.openxmlformats.org/officeDocument/2006/relationships" r:embed="rId3">
+          <a:blip xmlns:r="http://schemas.openxmlformats.org/officeDocument/2006/relationships">
             <a:extLst>
               <a:ext uri="{28A0092B-C50C-407E-A947-70E740481C1C}">
                 <a14:useLocalDpi xmlns:a14="http://schemas.microsoft.com/office/drawing/2010/main" val="0"/>
               </a:ext>
               <a:ext uri="{96DAC541-7B7A-43D3-8B79-37D633B846F1}">
-                <asvg:svgBlip xmlns:asvg="http://schemas.microsoft.com/office/drawing/2016/SVG/main" r:embed="rId4"/>
+                <asvg:svgBlip xmlns:asvg="http://schemas.microsoft.com/office/drawing/2016/SVG/main" r:embed="rId2"/>
               </a:ext>
             </a:extLst>
           </a:blip>
@@ -1791,10 +1791,10 @@
           <a:avLst/>
         </a:prstGeom>
         <a:blipFill>
-          <a:blip xmlns:r="http://schemas.openxmlformats.org/officeDocument/2006/relationships" r:embed="rId5">
+          <a:blip xmlns:r="http://schemas.openxmlformats.org/officeDocument/2006/relationships">
             <a:extLst>
               <a:ext uri="{96DAC541-7B7A-43D3-8B79-37D633B846F1}">
-                <asvg:svgBlip xmlns:asvg="http://schemas.microsoft.com/office/drawing/2016/SVG/main" r:embed="rId6"/>
+                <asvg:svgBlip xmlns:asvg="http://schemas.microsoft.com/office/drawing/2016/SVG/main" r:embed="rId3"/>
               </a:ext>
             </a:extLst>
           </a:blip>
@@ -9270,6 +9270,27 @@
           <a:p>
             <a:r>
               <a:rPr lang="en-US" sz="1700" b="1" dirty="0"/>
+              <a:t>Course material: </a:t>
+            </a:r>
+            <a:r>
+              <a:rPr lang="en-US" sz="1700" dirty="0"/>
+              <a:t>Canvas and the course GitHub page at: </a:t>
+            </a:r>
+            <a:r>
+              <a:rPr lang="en-US" sz="1700" dirty="0">
+                <a:hlinkClick r:id="rId2"/>
+              </a:rPr>
+              <a:t>https://mhahsler.github.io/Introduction_to_Artificial_Intelligence/</a:t>
+            </a:r>
+            <a:r>
+              <a:rPr lang="en-US" sz="1700" dirty="0"/>
+              <a:t> </a:t>
+            </a:r>
+            <a:endParaRPr lang="en-US" sz="1700" b="1" dirty="0"/>
+          </a:p>
+          <a:p>
+            <a:r>
+              <a:rPr lang="en-US" sz="1700" b="1" dirty="0"/>
               <a:t>Office hours</a:t>
             </a:r>
             <a:r>
@@ -9857,7 +9878,24 @@
           <a:p>
             <a:r>
               <a:rPr lang="en-US" sz="1700" dirty="0"/>
-              <a:t>Students are expected to obtain any missing knowledge independently. </a:t>
+              <a:t>Students are expected to obtain any missing knowledge independently.</a:t>
+            </a:r>
+            <a:br>
+              <a:rPr lang="en-US" sz="1700" dirty="0"/>
+            </a:br>
+            <a:r>
+              <a:rPr lang="en-US" sz="1700" dirty="0"/>
+              <a:t>Links to learning material are available on the </a:t>
+            </a:r>
+            <a:r>
+              <a:rPr lang="en-US" sz="1700" dirty="0">
+                <a:hlinkClick r:id="rId2"/>
+              </a:rPr>
+              <a:t>course GitHub page</a:t>
+            </a:r>
+            <a:r>
+              <a:rPr lang="en-US" sz="1700" dirty="0"/>
+              <a:t>. </a:t>
             </a:r>
           </a:p>
         </p:txBody>
